--- a/tempo-effect-paper/manuscripts/PopStudies_Figures_EN.pptx
+++ b/tempo-effect-paper/manuscripts/PopStudies_Figures_EN.pptx
@@ -3173,7 +3173,7 @@
               <a:defRPr sz="1100" i="1"/>
             </a:pPr>
             <a:r>
-              <a:t>Dynamic model (blue dashed) updates parameters decadally; static model (red dotted) uses 1970 base-year parameters; black solid = UN WPP 2024 observed.</a:t>
+              <a:t>Tempo-responsive model (blue dashed) updates all parameters decadally; fixed-parameter model (red dotted) uses 1970 base-year parameters; black solid = UN WPP 2024 observed.</a:t>
             </a:r>
           </a:p>
         </p:txBody>
@@ -3277,7 +3277,7 @@
               <a:defRPr sz="1100" i="1"/>
             </a:pPr>
             <a:r>
-              <a:t>Dynamic model MAPE shown in upper-right corner of each panel. Countries sorted alphabetically.</a:t>
+              <a:t>Tempo-responsive model MAPE shown in upper-right corner of each panel. Countries sorted alphabetically.</a:t>
             </a:r>
           </a:p>
         </p:txBody>
@@ -3326,7 +3326,7 @@
               <a:defRPr sz="1800" b="1"/>
             </a:pPr>
             <a:r>
-              <a:t>Figure 3: Static model MAPE (%) by country and base year</a:t>
+              <a:t>Figure 3: Fixed-parameter model MAPE (%) by country and base year</a:t>
             </a:r>
           </a:p>
         </p:txBody>
@@ -3430,7 +3430,7 @@
               <a:defRPr sz="1800" b="1"/>
             </a:pPr>
             <a:r>
-              <a:t>Figure 4: Static versus dynamic model comparison</a:t>
+              <a:t>Figure 4: Fixed-parameter versus tempo-responsive model comparison</a:t>
             </a:r>
           </a:p>
         </p:txBody>

--- a/tempo-effect-paper/manuscripts/PopStudies_Figures_EN.pptx
+++ b/tempo-effect-paper/manuscripts/PopStudies_Figures_EN.pptx
@@ -3118,7 +3118,7 @@
               <a:defRPr sz="1800" b="1"/>
             </a:pPr>
             <a:r>
-              <a:t>Figure 1: Model versus observed population trajectories, six representative countries, 1970–2023</a:t>
+              <a:t>Figure 1: Five model variants versus observed population, six representative countries, 1970–2023</a:t>
             </a:r>
           </a:p>
         </p:txBody>
@@ -3173,7 +3173,7 @@
               <a:defRPr sz="1100" i="1"/>
             </a:pPr>
             <a:r>
-              <a:t>Tempo-responsive model (blue dashed) updates all parameters decadally; fixed-parameter model (red dotted) uses 1970 base-year parameters; black solid = UN WPP 2024 observed.</a:t>
+              <a:t>Observed = black solid (UN WPP 2024); Tempo-responsive = blue; Tempo-invariant = orange dashed; Tempo-adjusted (TFR*) = green dash-dot; Fixed-parameter (1970) = red dotted.</a:t>
             </a:r>
           </a:p>
         </p:txBody>
@@ -3222,7 +3222,7 @@
               <a:defRPr sz="1800" b="1"/>
             </a:pPr>
             <a:r>
-              <a:t>Figure 2: Model validation across all 40 countries</a:t>
+              <a:t>Figure 2: Five-model validation across all 40 countries</a:t>
             </a:r>
           </a:p>
         </p:txBody>
@@ -3277,7 +3277,7 @@
               <a:defRPr sz="1100" i="1"/>
             </a:pPr>
             <a:r>
-              <a:t>Tempo-responsive model MAPE shown in upper-right corner of each panel. Countries sorted alphabetically.</a:t>
+              <a:t>Observed = black; Responsive = blue; Invariant = orange; Adjusted (TFR*) = green; Fixed = red. MAPE shown in upper-right corner. Countries sorted alphabetically.</a:t>
             </a:r>
           </a:p>
         </p:txBody>
@@ -3430,7 +3430,7 @@
               <a:defRPr sz="1800" b="1"/>
             </a:pPr>
             <a:r>
-              <a:t>Figure 4: Fixed-parameter versus tempo-responsive model comparison</a:t>
+              <a:t>Figure 4: Four-model comparison — MAPE and final population ratio</a:t>
             </a:r>
           </a:p>
         </p:txBody>
@@ -3451,8 +3451,8 @@
         </p:blipFill>
         <p:spPr>
           <a:xfrm>
-            <a:off x="1523847" y="914400"/>
-            <a:ext cx="9144000" cy="4538292"/>
+            <a:off x="2002446" y="914400"/>
+            <a:ext cx="8186802" cy="4754880"/>
           </a:xfrm>
           <a:prstGeom prst="rect">
             <a:avLst/>
@@ -3485,7 +3485,7 @@
               <a:defRPr sz="1100" i="1"/>
             </a:pPr>
             <a:r>
-              <a:t>Left panel: MAPE by country. Right panel: final population ratio (model/observed in 2023).</a:t>
+              <a:t>Left: MAPE by country for fixed (red), invariant (orange), responsive (blue), adjusted TFR* (green). Right: final ratio (model/observed, 2023). TFR* achieves best overall fit.</a:t>
             </a:r>
           </a:p>
         </p:txBody>

--- a/tempo-effect-paper/manuscripts/PopStudies_Figures_EN.pptx
+++ b/tempo-effect-paper/manuscripts/PopStudies_Figures_EN.pptx
@@ -3139,8 +3139,8 @@
         </p:blipFill>
         <p:spPr>
           <a:xfrm>
-            <a:off x="1813264" y="914400"/>
-            <a:ext cx="8565166" cy="4754880"/>
+            <a:off x="1818845" y="914400"/>
+            <a:ext cx="8554005" cy="4754880"/>
           </a:xfrm>
           <a:prstGeom prst="rect">
             <a:avLst/>
@@ -3243,8 +3243,8 @@
         </p:blipFill>
         <p:spPr>
           <a:xfrm>
-            <a:off x="4239618" y="914400"/>
-            <a:ext cx="3712459" cy="4754880"/>
+            <a:off x="4239381" y="914400"/>
+            <a:ext cx="3712932" cy="4754880"/>
           </a:xfrm>
           <a:prstGeom prst="rect">
             <a:avLst/>
@@ -3347,8 +3347,8 @@
         </p:blipFill>
         <p:spPr>
           <a:xfrm>
-            <a:off x="4646627" y="914400"/>
-            <a:ext cx="2898440" cy="4754880"/>
+            <a:off x="4646955" y="914400"/>
+            <a:ext cx="2897785" cy="4754880"/>
           </a:xfrm>
           <a:prstGeom prst="rect">
             <a:avLst/>
@@ -3451,8 +3451,8 @@
         </p:blipFill>
         <p:spPr>
           <a:xfrm>
-            <a:off x="2002446" y="914400"/>
-            <a:ext cx="8186802" cy="4754880"/>
+            <a:off x="2004665" y="914400"/>
+            <a:ext cx="8182365" cy="4754880"/>
           </a:xfrm>
           <a:prstGeom prst="rect">
             <a:avLst/>
@@ -3556,7 +3556,7 @@
         <p:spPr>
           <a:xfrm>
             <a:off x="1523847" y="914400"/>
-            <a:ext cx="9144000" cy="3021880"/>
+            <a:ext cx="9144000" cy="3029833"/>
           </a:xfrm>
           <a:prstGeom prst="rect">
             <a:avLst/>
